--- a/情報論1_2025.pptx
+++ b/情報論1_2025.pptx
@@ -5496,7 +5496,37 @@
             <a:pPr lvl="1"/>
             <a:r>
               <a:rPr lang="ja-JP" altLang="en-US"/>
-              <a:t>英語翻訳、スライド作成、ホームページ作成、アプリ開発、．．．</a:t>
+              <a:t>英語翻訳、</a:t>
+            </a:r>
+            <a:r>
+              <a:rPr lang="ja-JP" altLang="en-US">
+                <a:hlinkClick r:id="rId2"/>
+              </a:rPr>
+              <a:t>スライド作成</a:t>
+            </a:r>
+            <a:r>
+              <a:rPr lang="ja-JP" altLang="en-US"/>
+              <a:t>、</a:t>
+            </a:r>
+            <a:r>
+              <a:rPr lang="ja-JP" altLang="en-US">
+                <a:hlinkClick r:id="rId3"/>
+              </a:rPr>
+              <a:t>ホームページ作成</a:t>
+            </a:r>
+            <a:r>
+              <a:rPr lang="ja-JP" altLang="en-US"/>
+              <a:t>、</a:t>
+            </a:r>
+            <a:r>
+              <a:rPr lang="ja-JP" altLang="en-US">
+                <a:hlinkClick r:id="rId4"/>
+              </a:rPr>
+              <a:t>アプリ開発</a:t>
+            </a:r>
+            <a:r>
+              <a:rPr lang="ja-JP" altLang="en-US"/>
+              <a:t>、．．．</a:t>
             </a:r>
             <a:endParaRPr lang="en-US" altLang="ja-JP" dirty="0"/>
           </a:p>
@@ -5504,7 +5534,14 @@
             <a:pPr lvl="1"/>
             <a:r>
               <a:rPr lang="ja-JP" altLang="en-US"/>
-              <a:t>この授業はもともと、英語翻訳が主だったので、最初の数回は英語翻訳をします</a:t>
+              <a:t>この授業はもともと、英語翻訳が主だったので、最初の数回は</a:t>
+            </a:r>
+            <a:br>
+              <a:rPr lang="en-US" altLang="ja-JP" dirty="0"/>
+            </a:br>
+            <a:r>
+              <a:rPr lang="ja-JP" altLang="en-US"/>
+              <a:t>英語翻訳をします</a:t>
             </a:r>
             <a:endParaRPr kumimoji="1" lang="ja-JP" altLang="en-US"/>
           </a:p>
